--- a/media/resources/files/EkiOrunduuKoshuuJoopTorchosu_Atb0w3n.pptx
+++ b/media/resources/files/EkiOrunduuKoshuuJoopTorchosu_Atb0w3n.pptx
@@ -14507,7 +14507,7 @@
             </a:pPr>
             <a:r>
               <a:rPr lang="ru-RU" sz="2400" dirty="0"/>
-              <a:t>Турдуу пикирлер учун ыраазычылык билдиребиз.</a:t>
+              <a:t>Түрдүү пикирлер үчүн ыраазычылык билдиребиз.</a:t>
             </a:r>
           </a:p>
           <a:p>

--- a/media/resources/files/EkiOrunduuKoshuuJoopTorchosu_Atb0w3n.pptx
+++ b/media/resources/files/EkiOrunduuKoshuuJoopTorchosu_Atb0w3n.pptx
@@ -7561,7 +7561,7 @@
                           </a:solidFill>
                           <a:latin typeface="Bahnschrift" panose="020B0502040204020203" pitchFamily="34" charset="0"/>
                         </a:rPr>
-                        <a:t>4.64</a:t>
+                        <a:t>4,64</a:t>
                       </a:r>
                     </a:p>
                   </a:txBody>
@@ -7620,7 +7620,7 @@
                           </a:solidFill>
                           <a:latin typeface="Bahnschrift" panose="020B0502040204020203" pitchFamily="34" charset="0"/>
                         </a:rPr>
-                        <a:t>9.82</a:t>
+                        <a:t>9,82</a:t>
                       </a:r>
                     </a:p>
                   </a:txBody>
@@ -7679,7 +7679,7 @@
                           </a:solidFill>
                           <a:latin typeface="Bahnschrift" panose="020B0502040204020203" pitchFamily="34" charset="0"/>
                         </a:rPr>
-                        <a:t>4.32</a:t>
+                        <a:t>4,32</a:t>
                       </a:r>
                     </a:p>
                   </a:txBody>
@@ -7738,7 +7738,7 @@
                           </a:solidFill>
                           <a:latin typeface="Bahnschrift" panose="020B0502040204020203" pitchFamily="34" charset="0"/>
                         </a:rPr>
-                        <a:t>15.97</a:t>
+                        <a:t>15,97</a:t>
                       </a:r>
                     </a:p>
                   </a:txBody>
@@ -7797,7 +7797,7 @@
                           </a:solidFill>
                           <a:latin typeface="Bahnschrift" panose="020B0502040204020203" pitchFamily="34" charset="0"/>
                         </a:rPr>
-                        <a:t>8.12</a:t>
+                        <a:t>8,12</a:t>
                       </a:r>
                     </a:p>
                   </a:txBody>
@@ -7863,7 +7863,7 @@
                           </a:solidFill>
                           <a:latin typeface="Bahnschrift" panose="020B0502040204020203" pitchFamily="34" charset="0"/>
                         </a:rPr>
-                        <a:t>15.2</a:t>
+                        <a:t>15,2</a:t>
                       </a:r>
                     </a:p>
                   </a:txBody>
@@ -7922,7 +7922,7 @@
                           </a:solidFill>
                           <a:latin typeface="Bahnschrift" panose="020B0502040204020203" pitchFamily="34" charset="0"/>
                         </a:rPr>
-                        <a:t>3.56</a:t>
+                        <a:t>3,56</a:t>
                       </a:r>
                     </a:p>
                   </a:txBody>
@@ -7981,7 +7981,7 @@
                           </a:solidFill>
                           <a:latin typeface="Bahnschrift" panose="020B0502040204020203" pitchFamily="34" charset="0"/>
                         </a:rPr>
-                        <a:t>14.21</a:t>
+                        <a:t>14,21</a:t>
                       </a:r>
                     </a:p>
                   </a:txBody>
@@ -8040,7 +8040,7 @@
                           </a:solidFill>
                           <a:latin typeface="Bahnschrift" panose="020B0502040204020203" pitchFamily="34" charset="0"/>
                         </a:rPr>
-                        <a:t>6.1</a:t>
+                        <a:t>6,1</a:t>
                       </a:r>
                     </a:p>
                   </a:txBody>
@@ -8099,7 +8099,7 @@
                           </a:solidFill>
                           <a:latin typeface="Bahnschrift" panose="020B0502040204020203" pitchFamily="34" charset="0"/>
                         </a:rPr>
-                        <a:t>5.7</a:t>
+                        <a:t>5,7</a:t>
                       </a:r>
                     </a:p>
                   </a:txBody>
@@ -8165,7 +8165,7 @@
                           </a:solidFill>
                           <a:latin typeface="Bahnschrift" panose="020B0502040204020203" pitchFamily="34" charset="0"/>
                         </a:rPr>
-                        <a:t>14.02</a:t>
+                        <a:t>14,02</a:t>
                       </a:r>
                     </a:p>
                   </a:txBody>
@@ -8224,7 +8224,7 @@
                           </a:solidFill>
                           <a:latin typeface="Bahnschrift" panose="020B0502040204020203" pitchFamily="34" charset="0"/>
                         </a:rPr>
-                        <a:t>6.73</a:t>
+                        <a:t>6,73</a:t>
                       </a:r>
                     </a:p>
                   </a:txBody>
@@ -8283,7 +8283,7 @@
                           </a:solidFill>
                           <a:latin typeface="Bahnschrift" panose="020B0502040204020203" pitchFamily="34" charset="0"/>
                         </a:rPr>
-                        <a:t>9.1</a:t>
+                        <a:t>9,1</a:t>
                       </a:r>
                     </a:p>
                   </a:txBody>
@@ -8342,7 +8342,7 @@
                           </a:solidFill>
                           <a:latin typeface="Bahnschrift" panose="020B0502040204020203" pitchFamily="34" charset="0"/>
                         </a:rPr>
-                        <a:t>13.2</a:t>
+                        <a:t>13,2</a:t>
                       </a:r>
                     </a:p>
                   </a:txBody>
@@ -8401,7 +8401,7 @@
                           </a:solidFill>
                           <a:latin typeface="Bahnschrift" panose="020B0502040204020203" pitchFamily="34" charset="0"/>
                         </a:rPr>
-                        <a:t>15.27</a:t>
+                        <a:t>15,27</a:t>
                       </a:r>
                     </a:p>
                   </a:txBody>
@@ -8467,7 +8467,7 @@
                           </a:solidFill>
                           <a:latin typeface="Bahnschrift" panose="020B0502040204020203" pitchFamily="34" charset="0"/>
                         </a:rPr>
-                        <a:t>6.16</a:t>
+                        <a:t>6,16</a:t>
                       </a:r>
                     </a:p>
                   </a:txBody>
@@ -8526,7 +8526,7 @@
                           </a:solidFill>
                           <a:latin typeface="Bahnschrift" panose="020B0502040204020203" pitchFamily="34" charset="0"/>
                         </a:rPr>
-                        <a:t>11.81</a:t>
+                        <a:t>11,81</a:t>
                       </a:r>
                     </a:p>
                   </a:txBody>
@@ -8585,7 +8585,7 @@
                           </a:solidFill>
                           <a:latin typeface="Bahnschrift" panose="020B0502040204020203" pitchFamily="34" charset="0"/>
                         </a:rPr>
-                        <a:t>6.51</a:t>
+                        <a:t>6,51</a:t>
                       </a:r>
                     </a:p>
                   </a:txBody>
@@ -8644,7 +8644,7 @@
                           </a:solidFill>
                           <a:latin typeface="Bahnschrift" panose="020B0502040204020203" pitchFamily="34" charset="0"/>
                         </a:rPr>
-                        <a:t>4.8</a:t>
+                        <a:t>4,8</a:t>
                       </a:r>
                     </a:p>
                   </a:txBody>
@@ -8703,7 +8703,7 @@
                           </a:solidFill>
                           <a:latin typeface="Bahnschrift" panose="020B0502040204020203" pitchFamily="34" charset="0"/>
                         </a:rPr>
-                        <a:t>6.2</a:t>
+                        <a:t>6,2</a:t>
                       </a:r>
                     </a:p>
                   </a:txBody>
@@ -8769,7 +8769,7 @@
                           </a:solidFill>
                           <a:latin typeface="Bahnschrift" panose="020B0502040204020203" pitchFamily="34" charset="0"/>
                         </a:rPr>
-                        <a:t>5.85</a:t>
+                        <a:t>5,85</a:t>
                       </a:r>
                     </a:p>
                   </a:txBody>
@@ -8828,7 +8828,7 @@
                           </a:solidFill>
                           <a:latin typeface="Bahnschrift" panose="020B0502040204020203" pitchFamily="34" charset="0"/>
                         </a:rPr>
-                        <a:t>3.5</a:t>
+                        <a:t>3,5</a:t>
                       </a:r>
                     </a:p>
                   </a:txBody>
@@ -8887,7 +8887,7 @@
                           </a:solidFill>
                           <a:latin typeface="Bahnschrift" panose="020B0502040204020203" pitchFamily="34" charset="0"/>
                         </a:rPr>
-                        <a:t>7.78</a:t>
+                        <a:t>7,78</a:t>
                       </a:r>
                     </a:p>
                   </a:txBody>
@@ -8946,7 +8946,7 @@
                           </a:solidFill>
                           <a:latin typeface="Bahnschrift" panose="020B0502040204020203" pitchFamily="34" charset="0"/>
                         </a:rPr>
-                        <a:t>12.19</a:t>
+                        <a:t>12,19</a:t>
                       </a:r>
                     </a:p>
                   </a:txBody>
@@ -9005,7 +9005,7 @@
                           </a:solidFill>
                           <a:latin typeface="Bahnschrift" panose="020B0502040204020203" pitchFamily="34" charset="0"/>
                         </a:rPr>
-                        <a:t>10.81</a:t>
+                        <a:t>10,81</a:t>
                       </a:r>
                     </a:p>
                   </a:txBody>
@@ -9142,7 +9142,7 @@
                           </a:solidFill>
                           <a:latin typeface="Bahnschrift" panose="020B0502040204020203" pitchFamily="34" charset="0"/>
                         </a:rPr>
-                        <a:t>2.4 + 3.7</a:t>
+                        <a:t>2,4 + 3,7</a:t>
                       </a:r>
                     </a:p>
                   </a:txBody>
@@ -9209,7 +9209,7 @@
                           </a:solidFill>
                           <a:latin typeface="Bahnschrift" panose="020B0502040204020203" pitchFamily="34" charset="0"/>
                         </a:rPr>
-                        <a:t>0.7 + 5.81</a:t>
+                        <a:t>0,7 + 5,81</a:t>
                       </a:r>
                     </a:p>
                   </a:txBody>
@@ -9276,7 +9276,7 @@
                           </a:solidFill>
                           <a:latin typeface="Bahnschrift" panose="020B0502040204020203" pitchFamily="34" charset="0"/>
                         </a:rPr>
-                        <a:t>5.2 + 4.62</a:t>
+                        <a:t>5,2 + 4,62</a:t>
                       </a:r>
                     </a:p>
                   </a:txBody>
@@ -9343,7 +9343,7 @@
                           </a:solidFill>
                           <a:latin typeface="Bahnschrift" panose="020B0502040204020203" pitchFamily="34" charset="0"/>
                         </a:rPr>
-                        <a:t>3.48 + 2.37</a:t>
+                        <a:t>3,48 + 2,37</a:t>
                       </a:r>
                     </a:p>
                   </a:txBody>
@@ -9410,7 +9410,7 @@
                           </a:solidFill>
                           <a:latin typeface="Bahnschrift" panose="020B0502040204020203" pitchFamily="34" charset="0"/>
                         </a:rPr>
-                        <a:t>8.21 + 7.06</a:t>
+                        <a:t>8,21 + 7,06</a:t>
                       </a:r>
                     </a:p>
                   </a:txBody>
@@ -9484,7 +9484,7 @@
                           </a:solidFill>
                           <a:latin typeface="Bahnschrift" panose="020B0502040204020203" pitchFamily="34" charset="0"/>
                         </a:rPr>
-                        <a:t>4.90 + 10.3</a:t>
+                        <a:t>4,90 + 10,3</a:t>
                       </a:r>
                     </a:p>
                   </a:txBody>
@@ -9551,7 +9551,7 @@
                           </a:solidFill>
                           <a:latin typeface="Bahnschrift" panose="020B0502040204020203" pitchFamily="34" charset="0"/>
                         </a:rPr>
-                        <a:t>1.11 + 5.62</a:t>
+                        <a:t>1,11 + 5,62</a:t>
                       </a:r>
                     </a:p>
                   </a:txBody>
@@ -9618,7 +9618,7 @@
                           </a:solidFill>
                           <a:latin typeface="Bahnschrift" panose="020B0502040204020203" pitchFamily="34" charset="0"/>
                         </a:rPr>
-                        <a:t>8.07 + 0.05</a:t>
+                        <a:t>8,07 + 0,05</a:t>
                       </a:r>
                     </a:p>
                   </a:txBody>
@@ -9685,7 +9685,7 @@
                           </a:solidFill>
                           <a:latin typeface="Bahnschrift" panose="020B0502040204020203" pitchFamily="34" charset="0"/>
                         </a:rPr>
-                        <a:t>4.99 + 7.2</a:t>
+                        <a:t>4,99 + 7,2</a:t>
                       </a:r>
                     </a:p>
                   </a:txBody>
@@ -9752,7 +9752,7 @@
                           </a:solidFill>
                           <a:latin typeface="Bahnschrift" panose="020B0502040204020203" pitchFamily="34" charset="0"/>
                         </a:rPr>
-                        <a:t>5.8 + 3.3</a:t>
+                        <a:t>5,8 + 3,3</a:t>
                       </a:r>
                     </a:p>
                   </a:txBody>
@@ -9826,7 +9826,7 @@
                           </a:solidFill>
                           <a:latin typeface="Bahnschrift" panose="020B0502040204020203" pitchFamily="34" charset="0"/>
                         </a:rPr>
-                        <a:t>6.07 + 0.09</a:t>
+                        <a:t>6,07 + 0,09</a:t>
                       </a:r>
                     </a:p>
                   </a:txBody>
@@ -9893,7 +9893,7 @@
                           </a:solidFill>
                           <a:latin typeface="Bahnschrift" panose="020B0502040204020203" pitchFamily="34" charset="0"/>
                         </a:rPr>
-                        <a:t>7.9 + 6.31</a:t>
+                        <a:t>7,9 + 6,31</a:t>
                       </a:r>
                     </a:p>
                   </a:txBody>
@@ -9960,7 +9960,7 @@
                           </a:solidFill>
                           <a:latin typeface="Bahnschrift" panose="020B0502040204020203" pitchFamily="34" charset="0"/>
                         </a:rPr>
-                        <a:t>6.67 + 4.14</a:t>
+                        <a:t>6,67 + 4,14</a:t>
                       </a:r>
                     </a:p>
                   </a:txBody>
@@ -10027,7 +10027,7 @@
                           </a:solidFill>
                           <a:latin typeface="Bahnschrift" panose="020B0502040204020203" pitchFamily="34" charset="0"/>
                         </a:rPr>
-                        <a:t>1.9 + 4.3</a:t>
+                        <a:t>1,9 + 4,3</a:t>
                       </a:r>
                     </a:p>
                   </a:txBody>
@@ -10094,7 +10094,7 @@
                           </a:solidFill>
                           <a:latin typeface="Bahnschrift" panose="020B0502040204020203" pitchFamily="34" charset="0"/>
                         </a:rPr>
-                        <a:t>0.58 + 4.06</a:t>
+                        <a:t>0,58 + 4,06</a:t>
                       </a:r>
                     </a:p>
                   </a:txBody>
@@ -10168,7 +10168,7 @@
                           </a:solidFill>
                           <a:latin typeface="Bahnschrift" panose="020B0502040204020203" pitchFamily="34" charset="0"/>
                         </a:rPr>
-                        <a:t>7.32 + 4.49</a:t>
+                        <a:t>7,32 + 4,49</a:t>
                       </a:r>
                     </a:p>
                   </a:txBody>
@@ -10235,7 +10235,7 @@
                           </a:solidFill>
                           <a:latin typeface="Bahnschrift" panose="020B0502040204020203" pitchFamily="34" charset="0"/>
                         </a:rPr>
-                        <a:t>2.1 + 3.6</a:t>
+                        <a:t>2,1 + 3,6</a:t>
                       </a:r>
                     </a:p>
                   </a:txBody>
@@ -10302,7 +10302,7 @@
                           </a:solidFill>
                           <a:latin typeface="Bahnschrift" panose="020B0502040204020203" pitchFamily="34" charset="0"/>
                         </a:rPr>
-                        <a:t>13.07 + 0.95</a:t>
+                        <a:t>13,07 + 0,95</a:t>
                       </a:r>
                     </a:p>
                   </a:txBody>
@@ -10369,7 +10369,7 @@
                           </a:solidFill>
                           <a:latin typeface="Bahnschrift" panose="020B0502040204020203" pitchFamily="34" charset="0"/>
                         </a:rPr>
-                        <a:t>0.73 + 4.07</a:t>
+                        <a:t>0,73 + 4,07</a:t>
                       </a:r>
                     </a:p>
                   </a:txBody>
@@ -10436,7 +10436,7 @@
                           </a:solidFill>
                           <a:latin typeface="Bahnschrift" panose="020B0502040204020203" pitchFamily="34" charset="0"/>
                         </a:rPr>
-                        <a:t>12.4 + 3.57</a:t>
+                        <a:t>12,4 + 3,57</a:t>
                       </a:r>
                     </a:p>
                   </a:txBody>
@@ -10886,7 +10886,7 @@
                           </a:solidFill>
                           <a:latin typeface="Bahnschrift" panose="020B0502040204020203" pitchFamily="34" charset="0"/>
                         </a:rPr>
-                        <a:t>4.64</a:t>
+                        <a:t>4,64</a:t>
                       </a:r>
                     </a:p>
                   </a:txBody>
@@ -10945,7 +10945,7 @@
                           </a:solidFill>
                           <a:latin typeface="Bahnschrift" panose="020B0502040204020203" pitchFamily="34" charset="0"/>
                         </a:rPr>
-                        <a:t>9.82</a:t>
+                        <a:t>9,82</a:t>
                       </a:r>
                     </a:p>
                   </a:txBody>
@@ -11004,7 +11004,7 @@
                           </a:solidFill>
                           <a:latin typeface="Bahnschrift" panose="020B0502040204020203" pitchFamily="34" charset="0"/>
                         </a:rPr>
-                        <a:t>4.32</a:t>
+                        <a:t>4,32</a:t>
                       </a:r>
                     </a:p>
                   </a:txBody>
@@ -11066,7 +11066,7 @@
                           </a:solidFill>
                           <a:latin typeface="Bahnschrift" panose="020B0502040204020203" pitchFamily="34" charset="0"/>
                         </a:rPr>
-                        <a:t>15.97</a:t>
+                        <a:t>15,97</a:t>
                       </a:r>
                     </a:p>
                   </a:txBody>
@@ -11125,7 +11125,7 @@
                           </a:solidFill>
                           <a:latin typeface="Bahnschrift" panose="020B0502040204020203" pitchFamily="34" charset="0"/>
                         </a:rPr>
-                        <a:t>8.12</a:t>
+                        <a:t>8,12</a:t>
                       </a:r>
                     </a:p>
                   </a:txBody>
@@ -11191,7 +11191,7 @@
                           </a:solidFill>
                           <a:latin typeface="Bahnschrift" panose="020B0502040204020203" pitchFamily="34" charset="0"/>
                         </a:rPr>
-                        <a:t>15.2</a:t>
+                        <a:t>15,2</a:t>
                       </a:r>
                     </a:p>
                   </a:txBody>
@@ -11250,7 +11250,7 @@
                           </a:solidFill>
                           <a:latin typeface="Bahnschrift" panose="020B0502040204020203" pitchFamily="34" charset="0"/>
                         </a:rPr>
-                        <a:t>3.56</a:t>
+                        <a:t>3,56</a:t>
                       </a:r>
                     </a:p>
                   </a:txBody>
@@ -11312,7 +11312,7 @@
                           </a:solidFill>
                           <a:latin typeface="Bahnschrift" panose="020B0502040204020203" pitchFamily="34" charset="0"/>
                         </a:rPr>
-                        <a:t>14.21</a:t>
+                        <a:t>14,21</a:t>
                       </a:r>
                     </a:p>
                   </a:txBody>
@@ -11371,7 +11371,7 @@
                           </a:solidFill>
                           <a:latin typeface="Bahnschrift" panose="020B0502040204020203" pitchFamily="34" charset="0"/>
                         </a:rPr>
-                        <a:t>6.1</a:t>
+                        <a:t>6,1</a:t>
                       </a:r>
                     </a:p>
                   </a:txBody>
@@ -11430,7 +11430,7 @@
                           </a:solidFill>
                           <a:latin typeface="Bahnschrift" panose="020B0502040204020203" pitchFamily="34" charset="0"/>
                         </a:rPr>
-                        <a:t>5.7</a:t>
+                        <a:t>5,7</a:t>
                       </a:r>
                     </a:p>
                   </a:txBody>
@@ -11496,7 +11496,7 @@
                           </a:solidFill>
                           <a:latin typeface="Bahnschrift" panose="020B0502040204020203" pitchFamily="34" charset="0"/>
                         </a:rPr>
-                        <a:t>14.02</a:t>
+                        <a:t>14,02</a:t>
                       </a:r>
                     </a:p>
                   </a:txBody>
@@ -11555,7 +11555,7 @@
                           </a:solidFill>
                           <a:latin typeface="Bahnschrift" panose="020B0502040204020203" pitchFamily="34" charset="0"/>
                         </a:rPr>
-                        <a:t>6.73</a:t>
+                        <a:t>6,73</a:t>
                       </a:r>
                     </a:p>
                   </a:txBody>
@@ -11614,7 +11614,7 @@
                           </a:solidFill>
                           <a:latin typeface="Bahnschrift" panose="020B0502040204020203" pitchFamily="34" charset="0"/>
                         </a:rPr>
-                        <a:t>9.1</a:t>
+                        <a:t>9,1</a:t>
                       </a:r>
                     </a:p>
                   </a:txBody>
@@ -11673,7 +11673,7 @@
                           </a:solidFill>
                           <a:latin typeface="Bahnschrift" panose="020B0502040204020203" pitchFamily="34" charset="0"/>
                         </a:rPr>
-                        <a:t>13.2</a:t>
+                        <a:t>13,2</a:t>
                       </a:r>
                     </a:p>
                   </a:txBody>
@@ -11735,7 +11735,7 @@
                           </a:solidFill>
                           <a:latin typeface="Bahnschrift" panose="020B0502040204020203" pitchFamily="34" charset="0"/>
                         </a:rPr>
-                        <a:t>15.27</a:t>
+                        <a:t>15,27</a:t>
                       </a:r>
                     </a:p>
                   </a:txBody>
@@ -11801,7 +11801,7 @@
                           </a:solidFill>
                           <a:latin typeface="Bahnschrift" panose="020B0502040204020203" pitchFamily="34" charset="0"/>
                         </a:rPr>
-                        <a:t>6.16</a:t>
+                        <a:t>6,16</a:t>
                       </a:r>
                     </a:p>
                   </a:txBody>
@@ -11860,7 +11860,7 @@
                           </a:solidFill>
                           <a:latin typeface="Bahnschrift" panose="020B0502040204020203" pitchFamily="34" charset="0"/>
                         </a:rPr>
-                        <a:t>11.81</a:t>
+                        <a:t>11,81</a:t>
                       </a:r>
                     </a:p>
                   </a:txBody>
@@ -11919,7 +11919,7 @@
                           </a:solidFill>
                           <a:latin typeface="Bahnschrift" panose="020B0502040204020203" pitchFamily="34" charset="0"/>
                         </a:rPr>
-                        <a:t>6.51</a:t>
+                        <a:t>6,51</a:t>
                       </a:r>
                     </a:p>
                   </a:txBody>
@@ -11978,7 +11978,7 @@
                           </a:solidFill>
                           <a:latin typeface="Bahnschrift" panose="020B0502040204020203" pitchFamily="34" charset="0"/>
                         </a:rPr>
-                        <a:t>4.8</a:t>
+                        <a:t>4,8</a:t>
                       </a:r>
                     </a:p>
                   </a:txBody>
@@ -12037,7 +12037,7 @@
                           </a:solidFill>
                           <a:latin typeface="Bahnschrift" panose="020B0502040204020203" pitchFamily="34" charset="0"/>
                         </a:rPr>
-                        <a:t>6.2</a:t>
+                        <a:t>6,2</a:t>
                       </a:r>
                     </a:p>
                   </a:txBody>
@@ -12103,7 +12103,7 @@
                           </a:solidFill>
                           <a:latin typeface="Bahnschrift" panose="020B0502040204020203" pitchFamily="34" charset="0"/>
                         </a:rPr>
-                        <a:t>5.85</a:t>
+                        <a:t>5,85</a:t>
                       </a:r>
                     </a:p>
                   </a:txBody>
@@ -12162,7 +12162,7 @@
                           </a:solidFill>
                           <a:latin typeface="Bahnschrift" panose="020B0502040204020203" pitchFamily="34" charset="0"/>
                         </a:rPr>
-                        <a:t>3.5</a:t>
+                        <a:t>3,5</a:t>
                       </a:r>
                     </a:p>
                   </a:txBody>
@@ -12224,7 +12224,7 @@
                           </a:solidFill>
                           <a:latin typeface="Bahnschrift" panose="020B0502040204020203" pitchFamily="34" charset="0"/>
                         </a:rPr>
-                        <a:t>7.78</a:t>
+                        <a:t>7,78</a:t>
                       </a:r>
                     </a:p>
                   </a:txBody>
@@ -12286,7 +12286,7 @@
                           </a:solidFill>
                           <a:latin typeface="Bahnschrift" panose="020B0502040204020203" pitchFamily="34" charset="0"/>
                         </a:rPr>
-                        <a:t>12.19</a:t>
+                        <a:t>12,19</a:t>
                       </a:r>
                     </a:p>
                   </a:txBody>
@@ -12345,7 +12345,7 @@
                           </a:solidFill>
                           <a:latin typeface="Bahnschrift" panose="020B0502040204020203" pitchFamily="34" charset="0"/>
                         </a:rPr>
-                        <a:t>10.81</a:t>
+                        <a:t>10,81</a:t>
                       </a:r>
                     </a:p>
                   </a:txBody>
@@ -12482,7 +12482,7 @@
                           </a:solidFill>
                           <a:latin typeface="Bahnschrift" panose="020B0502040204020203" pitchFamily="34" charset="0"/>
                         </a:rPr>
-                        <a:t>2.4 + 3.7</a:t>
+                        <a:t>2,4 + 3,7</a:t>
                       </a:r>
                     </a:p>
                   </a:txBody>
@@ -12549,7 +12549,7 @@
                           </a:solidFill>
                           <a:latin typeface="Bahnschrift" panose="020B0502040204020203" pitchFamily="34" charset="0"/>
                         </a:rPr>
-                        <a:t>0.7 + 5.81</a:t>
+                        <a:t>0,7 + 5,81</a:t>
                       </a:r>
                     </a:p>
                   </a:txBody>
@@ -12616,7 +12616,7 @@
                           </a:solidFill>
                           <a:latin typeface="Bahnschrift" panose="020B0502040204020203" pitchFamily="34" charset="0"/>
                         </a:rPr>
-                        <a:t>5.2 + 4.62</a:t>
+                        <a:t>5,2 + 4,62</a:t>
                       </a:r>
                     </a:p>
                   </a:txBody>
@@ -12683,7 +12683,7 @@
                           </a:solidFill>
                           <a:latin typeface="Bahnschrift" panose="020B0502040204020203" pitchFamily="34" charset="0"/>
                         </a:rPr>
-                        <a:t>3.48 + 2.37</a:t>
+                        <a:t>3,48 + 2,37</a:t>
                       </a:r>
                     </a:p>
                   </a:txBody>
@@ -12750,7 +12750,7 @@
                           </a:solidFill>
                           <a:latin typeface="Bahnschrift" panose="020B0502040204020203" pitchFamily="34" charset="0"/>
                         </a:rPr>
-                        <a:t>8.21 + 7.06</a:t>
+                        <a:t>8,21 + 7,06</a:t>
                       </a:r>
                     </a:p>
                   </a:txBody>
@@ -12824,7 +12824,7 @@
                           </a:solidFill>
                           <a:latin typeface="Bahnschrift" panose="020B0502040204020203" pitchFamily="34" charset="0"/>
                         </a:rPr>
-                        <a:t>4.90 + 10.3</a:t>
+                        <a:t>4,90 + 10,3</a:t>
                       </a:r>
                     </a:p>
                   </a:txBody>
@@ -12891,7 +12891,7 @@
                           </a:solidFill>
                           <a:latin typeface="Bahnschrift" panose="020B0502040204020203" pitchFamily="34" charset="0"/>
                         </a:rPr>
-                        <a:t>1.11 + 5.62</a:t>
+                        <a:t>1,11 + 5,62</a:t>
                       </a:r>
                     </a:p>
                   </a:txBody>
@@ -12958,7 +12958,7 @@
                           </a:solidFill>
                           <a:latin typeface="Bahnschrift" panose="020B0502040204020203" pitchFamily="34" charset="0"/>
                         </a:rPr>
-                        <a:t>8.07 + 0.05</a:t>
+                        <a:t>8,07 + 0,05</a:t>
                       </a:r>
                     </a:p>
                   </a:txBody>
@@ -13025,7 +13025,7 @@
                           </a:solidFill>
                           <a:latin typeface="Bahnschrift" panose="020B0502040204020203" pitchFamily="34" charset="0"/>
                         </a:rPr>
-                        <a:t>4.99 + 7.2</a:t>
+                        <a:t>4,99 + 7,2</a:t>
                       </a:r>
                     </a:p>
                   </a:txBody>
@@ -13092,7 +13092,7 @@
                           </a:solidFill>
                           <a:latin typeface="Bahnschrift" panose="020B0502040204020203" pitchFamily="34" charset="0"/>
                         </a:rPr>
-                        <a:t>5.8 + 3.3</a:t>
+                        <a:t>5,8 + 3,3</a:t>
                       </a:r>
                     </a:p>
                   </a:txBody>
@@ -13166,7 +13166,7 @@
                           </a:solidFill>
                           <a:latin typeface="Bahnschrift" panose="020B0502040204020203" pitchFamily="34" charset="0"/>
                         </a:rPr>
-                        <a:t>6.07 + 0.09</a:t>
+                        <a:t>6,07 + 0,09</a:t>
                       </a:r>
                     </a:p>
                   </a:txBody>
@@ -13233,7 +13233,7 @@
                           </a:solidFill>
                           <a:latin typeface="Bahnschrift" panose="020B0502040204020203" pitchFamily="34" charset="0"/>
                         </a:rPr>
-                        <a:t>7.9 + 6.31</a:t>
+                        <a:t>7,9 + 6,31</a:t>
                       </a:r>
                     </a:p>
                   </a:txBody>
@@ -13300,7 +13300,7 @@
                           </a:solidFill>
                           <a:latin typeface="Bahnschrift" panose="020B0502040204020203" pitchFamily="34" charset="0"/>
                         </a:rPr>
-                        <a:t>6.67 + 4.14</a:t>
+                        <a:t>6,67 + 4,14</a:t>
                       </a:r>
                     </a:p>
                   </a:txBody>
@@ -13367,7 +13367,7 @@
                           </a:solidFill>
                           <a:latin typeface="Bahnschrift" panose="020B0502040204020203" pitchFamily="34" charset="0"/>
                         </a:rPr>
-                        <a:t>1.9 + 4.3</a:t>
+                        <a:t>1,9 + 4,3</a:t>
                       </a:r>
                     </a:p>
                   </a:txBody>
@@ -13434,7 +13434,7 @@
                           </a:solidFill>
                           <a:latin typeface="Bahnschrift" panose="020B0502040204020203" pitchFamily="34" charset="0"/>
                         </a:rPr>
-                        <a:t>0.58 + 4.06</a:t>
+                        <a:t>0,58 + 4,06</a:t>
                       </a:r>
                     </a:p>
                   </a:txBody>
@@ -13508,7 +13508,7 @@
                           </a:solidFill>
                           <a:latin typeface="Bahnschrift" panose="020B0502040204020203" pitchFamily="34" charset="0"/>
                         </a:rPr>
-                        <a:t>7.32 + 4.49</a:t>
+                        <a:t>7,32 + 4,49</a:t>
                       </a:r>
                     </a:p>
                   </a:txBody>
@@ -13575,7 +13575,7 @@
                           </a:solidFill>
                           <a:latin typeface="Bahnschrift" panose="020B0502040204020203" pitchFamily="34" charset="0"/>
                         </a:rPr>
-                        <a:t>2.1 + 3.6</a:t>
+                        <a:t>2,1 + 3,6</a:t>
                       </a:r>
                     </a:p>
                   </a:txBody>
@@ -13642,7 +13642,7 @@
                           </a:solidFill>
                           <a:latin typeface="Bahnschrift" panose="020B0502040204020203" pitchFamily="34" charset="0"/>
                         </a:rPr>
-                        <a:t>13.07 + 0.95</a:t>
+                        <a:t>13,07 + 0,95</a:t>
                       </a:r>
                     </a:p>
                   </a:txBody>
@@ -13709,7 +13709,7 @@
                           </a:solidFill>
                           <a:latin typeface="Bahnschrift" panose="020B0502040204020203" pitchFamily="34" charset="0"/>
                         </a:rPr>
-                        <a:t>0.73 + 4.07</a:t>
+                        <a:t>0,73 + 4,07</a:t>
                       </a:r>
                     </a:p>
                   </a:txBody>
@@ -13776,7 +13776,7 @@
                           </a:solidFill>
                           <a:latin typeface="Bahnschrift" panose="020B0502040204020203" pitchFamily="34" charset="0"/>
                         </a:rPr>
-                        <a:t>12.4 + 3.57</a:t>
+                        <a:t>12,4 + 3,57</a:t>
                       </a:r>
                     </a:p>
                   </a:txBody>
@@ -13886,7 +13886,7 @@
                             <a:sysClr val="windowText" lastClr="000000"/>
                           </a:solidFill>
                         </a:rPr>
-                        <a:t>32.36</a:t>
+                        <a:t>32,36</a:t>
                       </a:r>
                     </a:p>
                   </a:txBody>
